--- a/output/LINK. kennismaking Securicon.pptx
+++ b/output/LINK. kennismaking Securicon.pptx
@@ -4083,7 +4083,7 @@
                 <a:ea typeface="Arial" pitchFamily="34" charset="-122"/>
                 <a:cs typeface="Arial" pitchFamily="34" charset="-120"/>
               </a:rPr>
-              <a:t>Eén persoon die jullie campagne kent, van script tot rapportage.</a:t>
+              <a:t>Eén persoon die jullie campagne kent, van kick-off tot rapportage.</a:t>
             </a:r>
             <a:endParaRPr lang="en-US" sz="950" dirty="0"/>
           </a:p>
@@ -5556,7 +5556,7 @@
                 <a:ea typeface="Arial" pitchFamily="34" charset="-122"/>
                 <a:cs typeface="Arial" pitchFamily="34" charset="-120"/>
               </a:rPr>
-              <a:t>Samen scherp: doelgroep, beslisser, propositie, bezwaren en wat een goede afspraak voor jullie is. Wij schrijven het belscript, jullie keuren goed.</a:t>
+              <a:t>Samen scherp: doelgroep, beslisser, propositie, bezwaren en wat een goede afspraak voor jullie is. Wij leggen de USP's en de opbouw van het gesprek vast, jullie keuren goed.</a:t>
             </a:r>
             <a:endParaRPr lang="en-US" sz="900" dirty="0"/>
           </a:p>
@@ -7542,7 +7542,7 @@
                 <a:ea typeface="Arial" pitchFamily="34" charset="-122"/>
                 <a:cs typeface="Arial" pitchFamily="34" charset="-120"/>
               </a:rPr>
-              <a:t>Kick-off en belscript</a:t>
+              <a:t>Kick-off en USP's</a:t>
             </a:r>
             <a:endParaRPr lang="en-US" sz="1150" dirty="0"/>
           </a:p>
@@ -7584,7 +7584,7 @@
                 <a:ea typeface="Arial" pitchFamily="34" charset="-122"/>
                 <a:cs typeface="Arial" pitchFamily="34" charset="-120"/>
               </a:rPr>
-              <a:t>Samen scherp wat we gaan vertellen en bij wie. Wij schrijven het belscript, jullie keuren het goed.</a:t>
+              <a:t>Samen scherp wat we gaan vertellen en bij wie. Wij leggen de USP's vast, jullie keuren ze goed.</a:t>
             </a:r>
             <a:endParaRPr lang="en-US" sz="875" dirty="0"/>
           </a:p>
@@ -8303,7 +8303,7 @@
         <p:spPr>
           <a:xfrm>
             <a:off x="3733791" y="5245087"/>
-            <a:ext cx="3555991" cy="215899"/>
+            <a:ext cx="3746491" cy="215899"/>
           </a:xfrm>
           <a:prstGeom prst="rect">
             <a:avLst/>
@@ -8327,7 +8327,7 @@
                 <a:ea typeface="Arial" pitchFamily="34" charset="-122"/>
                 <a:cs typeface="Arial" pitchFamily="34" charset="-120"/>
               </a:rPr>
-              <a:t>Kick-off en belscript</a:t>
+              <a:t>Kick-off en USP's</a:t>
             </a:r>
             <a:endParaRPr lang="en-US" sz="900" dirty="0"/>
           </a:p>
@@ -8349,7 +8349,7 @@
         </p:blipFill>
         <p:spPr>
           <a:xfrm>
-            <a:off x="7340582" y="5276837"/>
+            <a:off x="7556481" y="5276837"/>
             <a:ext cx="127000" cy="127000"/>
           </a:xfrm>
           <a:prstGeom prst="rect">
@@ -8365,8 +8365,8 @@
         </p:nvSpPr>
         <p:spPr>
           <a:xfrm>
-            <a:off x="7543781" y="5245087"/>
-            <a:ext cx="3555991" cy="215899"/>
+            <a:off x="7759681" y="5245087"/>
+            <a:ext cx="3746491" cy="215899"/>
           </a:xfrm>
           <a:prstGeom prst="rect">
             <a:avLst/>
@@ -8429,7 +8429,7 @@
         <p:spPr>
           <a:xfrm>
             <a:off x="3733791" y="5499086"/>
-            <a:ext cx="3555991" cy="215899"/>
+            <a:ext cx="3746491" cy="215899"/>
           </a:xfrm>
           <a:prstGeom prst="rect">
             <a:avLst/>
@@ -8475,7 +8475,7 @@
         </p:blipFill>
         <p:spPr>
           <a:xfrm>
-            <a:off x="7340582" y="5530836"/>
+            <a:off x="7556481" y="5530836"/>
             <a:ext cx="127000" cy="127000"/>
           </a:xfrm>
           <a:prstGeom prst="rect">
@@ -8491,8 +8491,8 @@
         </p:nvSpPr>
         <p:spPr>
           <a:xfrm>
-            <a:off x="7543781" y="5499086"/>
-            <a:ext cx="3555991" cy="215899"/>
+            <a:off x="7759681" y="5499086"/>
+            <a:ext cx="3746491" cy="215899"/>
           </a:xfrm>
           <a:prstGeom prst="rect">
             <a:avLst/>
@@ -8555,7 +8555,7 @@
         <p:spPr>
           <a:xfrm>
             <a:off x="3733791" y="5753086"/>
-            <a:ext cx="3555991" cy="215899"/>
+            <a:ext cx="3746491" cy="215899"/>
           </a:xfrm>
           <a:prstGeom prst="rect">
             <a:avLst/>
@@ -8601,7 +8601,7 @@
         </p:blipFill>
         <p:spPr>
           <a:xfrm>
-            <a:off x="7340582" y="5784836"/>
+            <a:off x="7556481" y="5784836"/>
             <a:ext cx="127000" cy="127000"/>
           </a:xfrm>
           <a:prstGeom prst="rect">
@@ -8617,8 +8617,8 @@
         </p:nvSpPr>
         <p:spPr>
           <a:xfrm>
-            <a:off x="7543781" y="5753086"/>
-            <a:ext cx="3555991" cy="215899"/>
+            <a:off x="7759681" y="5753086"/>
+            <a:ext cx="3746491" cy="215899"/>
           </a:xfrm>
           <a:prstGeom prst="rect">
             <a:avLst/>
@@ -10350,7 +10350,7 @@
                 <a:ea typeface="Arial" pitchFamily="34" charset="-122"/>
                 <a:cs typeface="Arial" pitchFamily="34" charset="-120"/>
               </a:rPr>
-              <a:t>Goedkeuring belscript</a:t>
+              <a:t>Goedkeuring op de USP's</a:t>
             </a:r>
             <a:endParaRPr lang="en-US" sz="1450" dirty="0"/>
           </a:p>
